--- a/2025/02-2 Метрики анализа ВР.pptx
+++ b/2025/02-2 Метрики анализа ВР.pptx
@@ -215,7 +215,7 @@
           <a:p>
             <a:fld id="{CDA96C9A-3213-B245-BC64-7E419D14BD9D}" type="datetimeFigureOut">
               <a:rPr lang="ru-RU" smtClean="0"/>
-              <a:t>15.07.2025</a:t>
+              <a:t>18.07.2025</a:t>
             </a:fld>
             <a:endParaRPr lang="ru-RU"/>
           </a:p>
@@ -5409,7 +5409,7 @@
           <a:p>
             <a:fld id="{BEE214BE-636D-8A45-BCA6-8B7ED77AA124}" type="datetime1">
               <a:rPr lang="ru-RU" smtClean="0"/>
-              <a:t>15.07.2025</a:t>
+              <a:t>18.07.2025</a:t>
             </a:fld>
             <a:endParaRPr lang="en-US"/>
           </a:p>
@@ -5579,7 +5579,7 @@
           <a:p>
             <a:fld id="{5855274A-4ED4-0146-A3E9-88EF200B5196}" type="datetime1">
               <a:rPr lang="ru-RU" smtClean="0"/>
-              <a:t>15.07.2025</a:t>
+              <a:t>18.07.2025</a:t>
             </a:fld>
             <a:endParaRPr lang="en-US"/>
           </a:p>
@@ -5759,7 +5759,7 @@
           <a:p>
             <a:fld id="{8A78DFF1-9FDC-144B-973E-B4B4609709DF}" type="datetime1">
               <a:rPr lang="ru-RU" smtClean="0"/>
-              <a:t>15.07.2025</a:t>
+              <a:t>18.07.2025</a:t>
             </a:fld>
             <a:endParaRPr lang="en-US"/>
           </a:p>
@@ -5929,7 +5929,7 @@
           <a:p>
             <a:fld id="{8233A339-F8AE-5C45-BEAE-07EF9DC78B60}" type="datetime1">
               <a:rPr lang="ru-RU" smtClean="0"/>
-              <a:t>15.07.2025</a:t>
+              <a:t>18.07.2025</a:t>
             </a:fld>
             <a:endParaRPr lang="en-US"/>
           </a:p>
@@ -6175,7 +6175,7 @@
           <a:p>
             <a:fld id="{7586FDE4-97E0-CE4A-988C-F30B221290A7}" type="datetime1">
               <a:rPr lang="ru-RU" smtClean="0"/>
-              <a:t>15.07.2025</a:t>
+              <a:t>18.07.2025</a:t>
             </a:fld>
             <a:endParaRPr lang="en-US"/>
           </a:p>
@@ -6407,7 +6407,7 @@
           <a:p>
             <a:fld id="{C36ECE8B-8DEC-154E-9F03-047C8DDA20DC}" type="datetime1">
               <a:rPr lang="ru-RU" smtClean="0"/>
-              <a:t>15.07.2025</a:t>
+              <a:t>18.07.2025</a:t>
             </a:fld>
             <a:endParaRPr lang="en-US"/>
           </a:p>
@@ -6774,7 +6774,7 @@
           <a:p>
             <a:fld id="{440816D5-BDB8-B34B-8ACA-ECBDD12E7321}" type="datetime1">
               <a:rPr lang="ru-RU" smtClean="0"/>
-              <a:t>15.07.2025</a:t>
+              <a:t>18.07.2025</a:t>
             </a:fld>
             <a:endParaRPr lang="en-US"/>
           </a:p>
@@ -6892,7 +6892,7 @@
           <a:p>
             <a:fld id="{8A8C589A-5627-764C-AF96-C1E2F9A00A4D}" type="datetime1">
               <a:rPr lang="ru-RU" smtClean="0"/>
-              <a:t>15.07.2025</a:t>
+              <a:t>18.07.2025</a:t>
             </a:fld>
             <a:endParaRPr lang="en-US"/>
           </a:p>
@@ -6987,7 +6987,7 @@
           <a:p>
             <a:fld id="{603EE0D0-1696-6D4F-B917-4AFB24A74E8B}" type="datetime1">
               <a:rPr lang="ru-RU" smtClean="0"/>
-              <a:t>15.07.2025</a:t>
+              <a:t>18.07.2025</a:t>
             </a:fld>
             <a:endParaRPr lang="en-US"/>
           </a:p>
@@ -7264,7 +7264,7 @@
           <a:p>
             <a:fld id="{13C8A91E-B09B-2240-9AA3-B1D4BCC6296E}" type="datetime1">
               <a:rPr lang="ru-RU" smtClean="0"/>
-              <a:t>15.07.2025</a:t>
+              <a:t>18.07.2025</a:t>
             </a:fld>
             <a:endParaRPr lang="en-US"/>
           </a:p>
@@ -7521,7 +7521,7 @@
           <a:p>
             <a:fld id="{3BE9760E-DA8D-6747-B31E-62858C8727B8}" type="datetime1">
               <a:rPr lang="ru-RU" smtClean="0"/>
-              <a:t>15.07.2025</a:t>
+              <a:t>18.07.2025</a:t>
             </a:fld>
             <a:endParaRPr lang="en-US"/>
           </a:p>
@@ -7734,7 +7734,7 @@
           <a:p>
             <a:fld id="{D31305DF-F750-CC43-967D-51A20925EE94}" type="datetime1">
               <a:rPr lang="ru-RU" smtClean="0"/>
-              <a:t>15.07.2025</a:t>
+              <a:t>18.07.2025</a:t>
             </a:fld>
             <a:endParaRPr lang="en-US"/>
           </a:p>
@@ -17681,8 +17681,8 @@
           <a:chExt cx="0" cy="0"/>
         </a:xfrm>
       </p:grpSpPr>
-      <mc:AlternateContent xmlns:mc="http://schemas.openxmlformats.org/markup-compatibility/2006" xmlns:a14="http://schemas.microsoft.com/office/drawing/2010/main">
-        <mc:Choice Requires="a14">
+      <mc:AlternateContent xmlns:mc="http://schemas.openxmlformats.org/markup-compatibility/2006">
+        <mc:Choice xmlns:a14="http://schemas.microsoft.com/office/drawing/2010/main" Requires="a14">
           <p:sp>
             <p:nvSpPr>
               <p:cNvPr id="3" name="Объект 2"/>
@@ -18455,8 +18455,13 @@
                       <m:rPr>
                         <m:nor/>
                       </m:rPr>
-                      <a:rPr lang="en-US" sz="2000"/>
-                      <m:t>Width</m:t>
+                      <a:rPr lang="en-US" sz="2000" dirty="0">
+                        <a:solidFill>
+                          <a:srgbClr val="000000"/>
+                        </a:solidFill>
+                        <a:latin typeface="Calibri" panose="020F0502020204030204" pitchFamily="34" charset="0"/>
+                      </a:rPr>
+                      <m:t>PINAW</m:t>
                     </m:r>
                     <m:r>
                       <a:rPr lang="ru-RU" sz="2000" i="1" dirty="0">
@@ -18694,7 +18699,7 @@
             </p:txBody>
           </p:sp>
         </mc:Choice>
-        <mc:Fallback xmlns="">
+        <mc:Fallback>
           <p:sp>
             <p:nvSpPr>
               <p:cNvPr id="3" name="Объект 2"/>
